--- a/Readme/IntroToModac.pptx
+++ b/Readme/IntroToModac.pptx
@@ -280,7 +280,7 @@
           <a:p>
             <a:fld id="{FA812CF8-5571-2F43-B531-95039EEE283D}" type="datetimeFigureOut">
               <a:rPr lang="en-US" smtClean="0"/>
-              <a:t>6/25/24</a:t>
+              <a:t>9/24/26</a:t>
             </a:fld>
             <a:endParaRPr lang="en-US"/>
           </a:p>
@@ -478,7 +478,7 @@
           <a:p>
             <a:fld id="{FA812CF8-5571-2F43-B531-95039EEE283D}" type="datetimeFigureOut">
               <a:rPr lang="en-US" smtClean="0"/>
-              <a:t>6/25/24</a:t>
+              <a:t>9/24/26</a:t>
             </a:fld>
             <a:endParaRPr lang="en-US"/>
           </a:p>
@@ -686,7 +686,7 @@
           <a:p>
             <a:fld id="{FA812CF8-5571-2F43-B531-95039EEE283D}" type="datetimeFigureOut">
               <a:rPr lang="en-US" smtClean="0"/>
-              <a:t>6/25/24</a:t>
+              <a:t>9/24/26</a:t>
             </a:fld>
             <a:endParaRPr lang="en-US"/>
           </a:p>
@@ -884,7 +884,7 @@
           <a:p>
             <a:fld id="{FA812CF8-5571-2F43-B531-95039EEE283D}" type="datetimeFigureOut">
               <a:rPr lang="en-US" smtClean="0"/>
-              <a:t>6/25/24</a:t>
+              <a:t>9/24/26</a:t>
             </a:fld>
             <a:endParaRPr lang="en-US"/>
           </a:p>
@@ -1159,7 +1159,7 @@
           <a:p>
             <a:fld id="{FA812CF8-5571-2F43-B531-95039EEE283D}" type="datetimeFigureOut">
               <a:rPr lang="en-US" smtClean="0"/>
-              <a:t>6/25/24</a:t>
+              <a:t>9/24/26</a:t>
             </a:fld>
             <a:endParaRPr lang="en-US"/>
           </a:p>
@@ -1424,7 +1424,7 @@
           <a:p>
             <a:fld id="{FA812CF8-5571-2F43-B531-95039EEE283D}" type="datetimeFigureOut">
               <a:rPr lang="en-US" smtClean="0"/>
-              <a:t>6/25/24</a:t>
+              <a:t>9/24/26</a:t>
             </a:fld>
             <a:endParaRPr lang="en-US"/>
           </a:p>
@@ -1836,7 +1836,7 @@
           <a:p>
             <a:fld id="{FA812CF8-5571-2F43-B531-95039EEE283D}" type="datetimeFigureOut">
               <a:rPr lang="en-US" smtClean="0"/>
-              <a:t>6/25/24</a:t>
+              <a:t>9/24/26</a:t>
             </a:fld>
             <a:endParaRPr lang="en-US"/>
           </a:p>
@@ -1977,7 +1977,7 @@
           <a:p>
             <a:fld id="{FA812CF8-5571-2F43-B531-95039EEE283D}" type="datetimeFigureOut">
               <a:rPr lang="en-US" smtClean="0"/>
-              <a:t>6/25/24</a:t>
+              <a:t>9/24/26</a:t>
             </a:fld>
             <a:endParaRPr lang="en-US"/>
           </a:p>
@@ -2090,7 +2090,7 @@
           <a:p>
             <a:fld id="{FA812CF8-5571-2F43-B531-95039EEE283D}" type="datetimeFigureOut">
               <a:rPr lang="en-US" smtClean="0"/>
-              <a:t>6/25/24</a:t>
+              <a:t>9/24/26</a:t>
             </a:fld>
             <a:endParaRPr lang="en-US"/>
           </a:p>
@@ -2401,7 +2401,7 @@
           <a:p>
             <a:fld id="{FA812CF8-5571-2F43-B531-95039EEE283D}" type="datetimeFigureOut">
               <a:rPr lang="en-US" smtClean="0"/>
-              <a:t>6/25/24</a:t>
+              <a:t>9/24/26</a:t>
             </a:fld>
             <a:endParaRPr lang="en-US"/>
           </a:p>
@@ -2689,7 +2689,7 @@
           <a:p>
             <a:fld id="{FA812CF8-5571-2F43-B531-95039EEE283D}" type="datetimeFigureOut">
               <a:rPr lang="en-US" smtClean="0"/>
-              <a:t>6/25/24</a:t>
+              <a:t>9/24/26</a:t>
             </a:fld>
             <a:endParaRPr lang="en-US"/>
           </a:p>
@@ -2930,7 +2930,7 @@
           <a:p>
             <a:fld id="{FA812CF8-5571-2F43-B531-95039EEE283D}" type="datetimeFigureOut">
               <a:rPr lang="en-US" smtClean="0"/>
-              <a:t>6/25/24</a:t>
+              <a:t>9/24/26</a:t>
             </a:fld>
             <a:endParaRPr lang="en-US"/>
           </a:p>
@@ -4095,7 +4095,7 @@
             </a:r>
             <a:r>
               <a:rPr lang="en-US" dirty="0"/>
-              <a:t>: A label for this comparison. Format must be “</a:t>
+              <a:t>: Sets comparison direction. Format must be “</a:t>
             </a:r>
             <a:r>
               <a:rPr lang="en-US" dirty="0" err="1"/>
@@ -5497,7 +5497,15 @@
             </a:r>
             <a:r>
               <a:rPr lang="en-US" dirty="0"/>
-              <a:t>: A label for this comparison. Format must be “</a:t>
+              <a:t>: Sets </a:t>
+            </a:r>
+            <a:r>
+              <a:rPr lang="en-US"/>
+              <a:t>comparison direction. </a:t>
+            </a:r>
+            <a:r>
+              <a:rPr lang="en-US" dirty="0"/>
+              <a:t>Format must be “</a:t>
             </a:r>
             <a:r>
               <a:rPr lang="en-US" dirty="0" err="1"/>
@@ -7734,7 +7742,7 @@
             </a:r>
             <a:r>
               <a:rPr lang="en-US" dirty="0"/>
-              <a:t>: A label for this comparison. Format must be “</a:t>
+              <a:t>: Sets comparison direction. Format must be “</a:t>
             </a:r>
             <a:r>
               <a:rPr lang="en-US" dirty="0" err="1"/>
